--- a/dist/초1/수학/몇째와짝수홀수/초1_수학_몇째와짝수홀수_02_짝수와홀수_학생용.pptx
+++ b/dist/초1/수학/몇째와짝수홀수/초1_수학_몇째와짝수홀수_02_짝수와홀수_학생용.pptx
@@ -120,13 +120,13 @@
   <p:extLst>
     <p:ext uri="{521415D9-36F7-43E2-AB2F-B90AF26B5E84}">
       <p14:sectionLst xmlns:p14="http://schemas.microsoft.com/office/powerpoint/2010/main">
-        <p14:section name="도입" id="{b3ffb7e6-b04c-44f4-9264-8a35396cc628}">
+        <p14:section name="도입" id="{dc1facf4-7933-1301-a6ac-cbbba59e6243}">
           <p14:sldIdLst>
             <p14:sldId id="256"/>
             <p14:sldId id="257"/>
           </p14:sldIdLst>
         </p14:section>
-        <p14:section name="개념" id="{7544737a-0389-0e68-b155-0f025fdf4d4c}">
+        <p14:section name="개념" id="{8a0c62c7-4864-253b-48d1-2edf6fe26f96}">
           <p14:sldIdLst>
             <p14:sldId id="258"/>
             <p14:sldId id="259"/>
@@ -135,31 +135,31 @@
             <p14:sldId id="263"/>
           </p14:sldIdLst>
         </p14:section>
-        <p14:section name="연습" id="{0e2e07a9-add2-bec3-7f7b-2fad0ca61c8f}">
+        <p14:section name="연습" id="{7f5076e5-a87f-19c0-ce8e-122c49915ad2}">
           <p14:sldIdLst>
             <p14:sldId id="261"/>
             <p14:sldId id="264"/>
             <p14:sldId id="265"/>
           </p14:sldIdLst>
         </p14:section>
-        <p14:section name="개념" id="{fcda4c36-afe7-5037-21d1-0c87e184f624}">
+        <p14:section name="개념" id="{bbce3c9a-82aa-d475-92fb-54380892d025}">
           <p14:sldIdLst/>
         </p14:section>
-        <p14:section name="연습" id="{ee2b70c4-2e3f-e628-4636-0b39d2cf7f2a}">
+        <p14:section name="연습" id="{89c3b7bb-b3c1-24fb-cf10-f5daa7b4e99a}">
           <p14:sldIdLst/>
         </p14:section>
-        <p14:section name="확인" id="{fec6aa47-d1c7-7860-1dcd-32e5a2226f3d}">
+        <p14:section name="확인" id="{44df9e1f-7232-0ddf-f0a9-2b0cdf1a76a0}">
           <p14:sldIdLst>
             <p14:sldId id="266"/>
             <p14:sldId id="267"/>
           </p14:sldIdLst>
         </p14:section>
-        <p14:section name="정리" id="{e4f2431b-a071-692d-a40e-d2eefacbbd98}">
+        <p14:section name="정리" id="{4da459a0-cdd1-e7ff-ff68-c402f83da41a}">
           <p14:sldIdLst>
             <p14:sldId id="268"/>
           </p14:sldIdLst>
         </p14:section>
-        <p14:section name="보충" id="{e9137b92-abbf-c0e2-b08e-a1f74c0d4479}">
+        <p14:section name="보충" id="{a55d6ee7-bbbe-5db3-7af0-1a5caf407856}">
           <p14:sldIdLst>
             <p14:sldId id="269"/>
           </p14:sldIdLst>

--- a/dist/초1/수학/몇째와짝수홀수/초1_수학_몇째와짝수홀수_02_짝수와홀수_학생용.pptx
+++ b/dist/초1/수학/몇째와짝수홀수/초1_수학_몇째와짝수홀수_02_짝수와홀수_학생용.pptx
@@ -120,13 +120,13 @@
   <p:extLst>
     <p:ext uri="{521415D9-36F7-43E2-AB2F-B90AF26B5E84}">
       <p14:sectionLst xmlns:p14="http://schemas.microsoft.com/office/powerpoint/2010/main">
-        <p14:section name="도입" id="{dc1facf4-7933-1301-a6ac-cbbba59e6243}">
+        <p14:section name="도입" id="{eb3716f9-2c34-76c5-d66a-09f5f1facafc}">
           <p14:sldIdLst>
             <p14:sldId id="256"/>
             <p14:sldId id="257"/>
           </p14:sldIdLst>
         </p14:section>
-        <p14:section name="개념" id="{8a0c62c7-4864-253b-48d1-2edf6fe26f96}">
+        <p14:section name="개념" id="{efac154c-3734-401f-5d08-a36afcc41781}">
           <p14:sldIdLst>
             <p14:sldId id="258"/>
             <p14:sldId id="259"/>
@@ -135,31 +135,31 @@
             <p14:sldId id="263"/>
           </p14:sldIdLst>
         </p14:section>
-        <p14:section name="연습" id="{7f5076e5-a87f-19c0-ce8e-122c49915ad2}">
+        <p14:section name="연습" id="{7a671f0c-896b-97ec-8df5-d581fd65dfe3}">
           <p14:sldIdLst>
             <p14:sldId id="261"/>
             <p14:sldId id="264"/>
             <p14:sldId id="265"/>
           </p14:sldIdLst>
         </p14:section>
-        <p14:section name="개념" id="{bbce3c9a-82aa-d475-92fb-54380892d025}">
+        <p14:section name="개념" id="{4ed55613-5ed5-4716-f79b-6e4e1d815534}">
           <p14:sldIdLst/>
         </p14:section>
-        <p14:section name="연습" id="{89c3b7bb-b3c1-24fb-cf10-f5daa7b4e99a}">
+        <p14:section name="연습" id="{9440d50c-bd8f-f543-d2d2-5a2e95b1b653}">
           <p14:sldIdLst/>
         </p14:section>
-        <p14:section name="확인" id="{44df9e1f-7232-0ddf-f0a9-2b0cdf1a76a0}">
+        <p14:section name="확인" id="{f6e94d02-8f23-9141-f943-7b74c37aac10}">
           <p14:sldIdLst>
             <p14:sldId id="266"/>
             <p14:sldId id="267"/>
           </p14:sldIdLst>
         </p14:section>
-        <p14:section name="정리" id="{4da459a0-cdd1-e7ff-ff68-c402f83da41a}">
+        <p14:section name="정리" id="{4098a936-f562-13e6-d816-b83c9769acd7}">
           <p14:sldIdLst>
             <p14:sldId id="268"/>
           </p14:sldIdLst>
         </p14:section>
-        <p14:section name="보충" id="{a55d6ee7-bbbe-5db3-7af0-1a5caf407856}">
+        <p14:section name="보충" id="{dd924676-c506-13c0-a967-58b594b135aa}">
           <p14:sldIdLst>
             <p14:sldId id="269"/>
           </p14:sldIdLst>
@@ -3850,7 +3850,7 @@
         </p:nvSpPr>
         <p:spPr>
           <a:xfrm>
-            <a:off x="548640" y="2459736"/>
+            <a:off x="548640" y="2734056"/>
             <a:ext cx="566928" cy="566928"/>
           </a:xfrm>
           <a:prstGeom prst="roundRect">
@@ -3897,8 +3897,8 @@
         </p:nvSpPr>
         <p:spPr>
           <a:xfrm>
-            <a:off x="1432966" y="2598318"/>
-            <a:ext cx="289763" cy="289763"/>
+            <a:off x="1440591" y="2860197"/>
+            <a:ext cx="314645" cy="314645"/>
           </a:xfrm>
           <a:prstGeom prst="ellipse">
             <a:avLst/>
@@ -3922,8 +3922,8 @@
         </p:nvSpPr>
         <p:spPr>
           <a:xfrm>
-            <a:off x="1900326" y="2598318"/>
-            <a:ext cx="289763" cy="289763"/>
+            <a:off x="1948083" y="2860197"/>
+            <a:ext cx="314645" cy="314645"/>
           </a:xfrm>
           <a:prstGeom prst="ellipse">
             <a:avLst/>
@@ -3947,8 +3947,8 @@
         </p:nvSpPr>
         <p:spPr>
           <a:xfrm>
-            <a:off x="2367686" y="2598318"/>
-            <a:ext cx="289763" cy="289763"/>
+            <a:off x="2455575" y="2860197"/>
+            <a:ext cx="314645" cy="314645"/>
           </a:xfrm>
           <a:prstGeom prst="ellipse">
             <a:avLst/>
@@ -3972,8 +3972,8 @@
         </p:nvSpPr>
         <p:spPr>
           <a:xfrm>
-            <a:off x="2835046" y="2598318"/>
-            <a:ext cx="289763" cy="289763"/>
+            <a:off x="2963067" y="2860197"/>
+            <a:ext cx="314645" cy="314645"/>
           </a:xfrm>
           <a:prstGeom prst="ellipse">
             <a:avLst/>
@@ -3997,8 +3997,8 @@
         </p:nvSpPr>
         <p:spPr>
           <a:xfrm>
-            <a:off x="3302406" y="2598318"/>
-            <a:ext cx="289763" cy="289763"/>
+            <a:off x="3470559" y="2860197"/>
+            <a:ext cx="314645" cy="314645"/>
           </a:xfrm>
           <a:prstGeom prst="ellipse">
             <a:avLst/>
@@ -4022,8 +4022,8 @@
         </p:nvSpPr>
         <p:spPr>
           <a:xfrm>
-            <a:off x="3769766" y="2598318"/>
-            <a:ext cx="289763" cy="289763"/>
+            <a:off x="3978051" y="2860197"/>
+            <a:ext cx="314645" cy="314645"/>
           </a:xfrm>
           <a:prstGeom prst="ellipse">
             <a:avLst/>
@@ -4047,8 +4047,8 @@
         </p:nvSpPr>
         <p:spPr>
           <a:xfrm>
-            <a:off x="4237126" y="2598318"/>
-            <a:ext cx="289763" cy="289763"/>
+            <a:off x="4485543" y="2860197"/>
+            <a:ext cx="314645" cy="314645"/>
           </a:xfrm>
           <a:prstGeom prst="ellipse">
             <a:avLst/>
@@ -4072,8 +4072,8 @@
         </p:nvSpPr>
         <p:spPr>
           <a:xfrm>
-            <a:off x="4704486" y="2598318"/>
-            <a:ext cx="289763" cy="289763"/>
+            <a:off x="4993035" y="2860197"/>
+            <a:ext cx="314645" cy="314645"/>
           </a:xfrm>
           <a:prstGeom prst="ellipse">
             <a:avLst/>
@@ -4097,8 +4097,8 @@
         </p:nvSpPr>
         <p:spPr>
           <a:xfrm>
-            <a:off x="5171846" y="2598318"/>
-            <a:ext cx="289763" cy="289763"/>
+            <a:off x="5500527" y="2860197"/>
+            <a:ext cx="314645" cy="314645"/>
           </a:xfrm>
           <a:prstGeom prst="ellipse">
             <a:avLst/>
@@ -4122,8 +4122,8 @@
         </p:nvSpPr>
         <p:spPr>
           <a:xfrm>
-            <a:off x="1344168" y="2509520"/>
-            <a:ext cx="4206240" cy="467360"/>
+            <a:off x="1344168" y="2763774"/>
+            <a:ext cx="4567428" cy="507492"/>
           </a:xfrm>
           <a:prstGeom prst="rect">
             <a:avLst/>
@@ -7794,7 +7794,7 @@
         </p:nvSpPr>
         <p:spPr>
           <a:xfrm>
-            <a:off x="548640" y="1773936"/>
+            <a:off x="548640" y="1796796"/>
             <a:ext cx="566928" cy="566928"/>
           </a:xfrm>
           <a:prstGeom prst="roundRect">
@@ -7841,8 +7841,8 @@
         </p:nvSpPr>
         <p:spPr>
           <a:xfrm>
-            <a:off x="1344168" y="1668780"/>
-            <a:ext cx="388620" cy="388620"/>
+            <a:off x="1344168" y="1563624"/>
+            <a:ext cx="516636" cy="516636"/>
           </a:xfrm>
           <a:prstGeom prst="rect">
             <a:avLst/>
@@ -7866,8 +7866,8 @@
         </p:nvSpPr>
         <p:spPr>
           <a:xfrm>
-            <a:off x="1410233" y="1734845"/>
-            <a:ext cx="256489" cy="256489"/>
+            <a:off x="1431996" y="1651452"/>
+            <a:ext cx="340980" cy="340980"/>
           </a:xfrm>
           <a:prstGeom prst="ellipse">
             <a:avLst/>
@@ -7891,8 +7891,8 @@
         </p:nvSpPr>
         <p:spPr>
           <a:xfrm>
-            <a:off x="1732788" y="1668780"/>
-            <a:ext cx="388620" cy="388620"/>
+            <a:off x="1860804" y="1563624"/>
+            <a:ext cx="516636" cy="516636"/>
           </a:xfrm>
           <a:prstGeom prst="rect">
             <a:avLst/>
@@ -7916,8 +7916,8 @@
         </p:nvSpPr>
         <p:spPr>
           <a:xfrm>
-            <a:off x="1798853" y="1734845"/>
-            <a:ext cx="256489" cy="256489"/>
+            <a:off x="1948632" y="1651452"/>
+            <a:ext cx="340980" cy="340980"/>
           </a:xfrm>
           <a:prstGeom prst="ellipse">
             <a:avLst/>
@@ -7941,8 +7941,8 @@
         </p:nvSpPr>
         <p:spPr>
           <a:xfrm>
-            <a:off x="2121408" y="1668780"/>
-            <a:ext cx="388620" cy="388620"/>
+            <a:off x="2377440" y="1563624"/>
+            <a:ext cx="516636" cy="516636"/>
           </a:xfrm>
           <a:prstGeom prst="rect">
             <a:avLst/>
@@ -7966,8 +7966,8 @@
         </p:nvSpPr>
         <p:spPr>
           <a:xfrm>
-            <a:off x="2187473" y="1734845"/>
-            <a:ext cx="256489" cy="256489"/>
+            <a:off x="2465268" y="1651452"/>
+            <a:ext cx="340980" cy="340980"/>
           </a:xfrm>
           <a:prstGeom prst="ellipse">
             <a:avLst/>
@@ -7991,8 +7991,8 @@
         </p:nvSpPr>
         <p:spPr>
           <a:xfrm>
-            <a:off x="2510028" y="1668780"/>
-            <a:ext cx="388620" cy="388620"/>
+            <a:off x="2894076" y="1563624"/>
+            <a:ext cx="516636" cy="516636"/>
           </a:xfrm>
           <a:prstGeom prst="rect">
             <a:avLst/>
@@ -8016,8 +8016,8 @@
         </p:nvSpPr>
         <p:spPr>
           <a:xfrm>
-            <a:off x="2576093" y="1734845"/>
-            <a:ext cx="256489" cy="256489"/>
+            <a:off x="2981904" y="1651452"/>
+            <a:ext cx="340980" cy="340980"/>
           </a:xfrm>
           <a:prstGeom prst="ellipse">
             <a:avLst/>
@@ -8041,8 +8041,8 @@
         </p:nvSpPr>
         <p:spPr>
           <a:xfrm>
-            <a:off x="2898648" y="1668780"/>
-            <a:ext cx="388620" cy="388620"/>
+            <a:off x="3410712" y="1563624"/>
+            <a:ext cx="516636" cy="516636"/>
           </a:xfrm>
           <a:prstGeom prst="rect">
             <a:avLst/>
@@ -8066,8 +8066,8 @@
         </p:nvSpPr>
         <p:spPr>
           <a:xfrm>
-            <a:off x="2964713" y="1734845"/>
-            <a:ext cx="256489" cy="256489"/>
+            <a:off x="3498540" y="1651452"/>
+            <a:ext cx="340980" cy="340980"/>
           </a:xfrm>
           <a:prstGeom prst="ellipse">
             <a:avLst/>
@@ -8091,8 +8091,8 @@
         </p:nvSpPr>
         <p:spPr>
           <a:xfrm>
-            <a:off x="1344168" y="2057400"/>
-            <a:ext cx="388620" cy="388620"/>
+            <a:off x="1344168" y="2080260"/>
+            <a:ext cx="516636" cy="516636"/>
           </a:xfrm>
           <a:prstGeom prst="rect">
             <a:avLst/>
@@ -8116,8 +8116,8 @@
         </p:nvSpPr>
         <p:spPr>
           <a:xfrm>
-            <a:off x="1410233" y="2123465"/>
-            <a:ext cx="256489" cy="256489"/>
+            <a:off x="1431996" y="2168088"/>
+            <a:ext cx="340980" cy="340980"/>
           </a:xfrm>
           <a:prstGeom prst="ellipse">
             <a:avLst/>
@@ -8141,8 +8141,8 @@
         </p:nvSpPr>
         <p:spPr>
           <a:xfrm>
-            <a:off x="1732788" y="2057400"/>
-            <a:ext cx="388620" cy="388620"/>
+            <a:off x="1860804" y="2080260"/>
+            <a:ext cx="516636" cy="516636"/>
           </a:xfrm>
           <a:prstGeom prst="rect">
             <a:avLst/>
@@ -8166,8 +8166,8 @@
         </p:nvSpPr>
         <p:spPr>
           <a:xfrm>
-            <a:off x="1798853" y="2123465"/>
-            <a:ext cx="256489" cy="256489"/>
+            <a:off x="1948632" y="2168088"/>
+            <a:ext cx="340980" cy="340980"/>
           </a:xfrm>
           <a:prstGeom prst="ellipse">
             <a:avLst/>
@@ -8191,8 +8191,8 @@
         </p:nvSpPr>
         <p:spPr>
           <a:xfrm>
-            <a:off x="2121408" y="2057400"/>
-            <a:ext cx="388620" cy="388620"/>
+            <a:off x="2377440" y="2080260"/>
+            <a:ext cx="516636" cy="516636"/>
           </a:xfrm>
           <a:prstGeom prst="rect">
             <a:avLst/>
@@ -8216,8 +8216,8 @@
         </p:nvSpPr>
         <p:spPr>
           <a:xfrm>
-            <a:off x="2187473" y="2123465"/>
-            <a:ext cx="256489" cy="256489"/>
+            <a:off x="2465268" y="2168088"/>
+            <a:ext cx="340980" cy="340980"/>
           </a:xfrm>
           <a:prstGeom prst="ellipse">
             <a:avLst/>
@@ -8241,8 +8241,8 @@
         </p:nvSpPr>
         <p:spPr>
           <a:xfrm>
-            <a:off x="2510028" y="2057400"/>
-            <a:ext cx="388620" cy="388620"/>
+            <a:off x="2894076" y="2080260"/>
+            <a:ext cx="516636" cy="516636"/>
           </a:xfrm>
           <a:prstGeom prst="rect">
             <a:avLst/>
@@ -8266,8 +8266,8 @@
         </p:nvSpPr>
         <p:spPr>
           <a:xfrm>
-            <a:off x="2576093" y="2123465"/>
-            <a:ext cx="256489" cy="256489"/>
+            <a:off x="2981904" y="2168088"/>
+            <a:ext cx="340980" cy="340980"/>
           </a:xfrm>
           <a:prstGeom prst="ellipse">
             <a:avLst/>
@@ -8291,8 +8291,8 @@
         </p:nvSpPr>
         <p:spPr>
           <a:xfrm>
-            <a:off x="2898648" y="2057400"/>
-            <a:ext cx="388620" cy="388620"/>
+            <a:off x="3410712" y="2080260"/>
+            <a:ext cx="516636" cy="516636"/>
           </a:xfrm>
           <a:prstGeom prst="rect">
             <a:avLst/>
@@ -8316,8 +8316,8 @@
         </p:nvSpPr>
         <p:spPr>
           <a:xfrm>
-            <a:off x="2964713" y="2123465"/>
-            <a:ext cx="256489" cy="256489"/>
+            <a:off x="3498540" y="2168088"/>
+            <a:ext cx="340980" cy="340980"/>
           </a:xfrm>
           <a:prstGeom prst="ellipse">
             <a:avLst/>
@@ -8341,8 +8341,8 @@
         </p:nvSpPr>
         <p:spPr>
           <a:xfrm>
-            <a:off x="1344168" y="1668780"/>
-            <a:ext cx="1943100" cy="777240"/>
+            <a:off x="1344168" y="1563624"/>
+            <a:ext cx="2583180" cy="1033272"/>
           </a:xfrm>
           <a:prstGeom prst="rect">
             <a:avLst/>
@@ -8368,8 +8368,8 @@
         </p:nvSpPr>
         <p:spPr>
           <a:xfrm>
-            <a:off x="3607308" y="1668780"/>
-            <a:ext cx="388620" cy="388620"/>
+            <a:off x="4247388" y="1563624"/>
+            <a:ext cx="516636" cy="516636"/>
           </a:xfrm>
           <a:prstGeom prst="rect">
             <a:avLst/>
@@ -8393,8 +8393,8 @@
         </p:nvSpPr>
         <p:spPr>
           <a:xfrm>
-            <a:off x="3673373" y="1734845"/>
-            <a:ext cx="256489" cy="256489"/>
+            <a:off x="4335216" y="1651452"/>
+            <a:ext cx="340980" cy="340980"/>
           </a:xfrm>
           <a:prstGeom prst="ellipse">
             <a:avLst/>
@@ -8418,8 +8418,8 @@
         </p:nvSpPr>
         <p:spPr>
           <a:xfrm>
-            <a:off x="3995928" y="1668780"/>
-            <a:ext cx="388620" cy="388620"/>
+            <a:off x="4764024" y="1563624"/>
+            <a:ext cx="516636" cy="516636"/>
           </a:xfrm>
           <a:prstGeom prst="rect">
             <a:avLst/>
@@ -8443,8 +8443,8 @@
         </p:nvSpPr>
         <p:spPr>
           <a:xfrm>
-            <a:off x="4061993" y="1734845"/>
-            <a:ext cx="256489" cy="256489"/>
+            <a:off x="4851852" y="1651452"/>
+            <a:ext cx="340980" cy="340980"/>
           </a:xfrm>
           <a:prstGeom prst="ellipse">
             <a:avLst/>
@@ -8468,8 +8468,8 @@
         </p:nvSpPr>
         <p:spPr>
           <a:xfrm>
-            <a:off x="4384548" y="1668780"/>
-            <a:ext cx="388620" cy="388620"/>
+            <a:off x="5280660" y="1563624"/>
+            <a:ext cx="516636" cy="516636"/>
           </a:xfrm>
           <a:prstGeom prst="rect">
             <a:avLst/>
@@ -8493,8 +8493,8 @@
         </p:nvSpPr>
         <p:spPr>
           <a:xfrm>
-            <a:off x="4450613" y="1734845"/>
-            <a:ext cx="256489" cy="256489"/>
+            <a:off x="5368488" y="1651452"/>
+            <a:ext cx="340980" cy="340980"/>
           </a:xfrm>
           <a:prstGeom prst="ellipse">
             <a:avLst/>
@@ -8518,8 +8518,8 @@
         </p:nvSpPr>
         <p:spPr>
           <a:xfrm>
-            <a:off x="4773168" y="1668780"/>
-            <a:ext cx="388620" cy="388620"/>
+            <a:off x="5797296" y="1563624"/>
+            <a:ext cx="516636" cy="516636"/>
           </a:xfrm>
           <a:prstGeom prst="rect">
             <a:avLst/>
@@ -8543,8 +8543,8 @@
         </p:nvSpPr>
         <p:spPr>
           <a:xfrm>
-            <a:off x="4839233" y="1734845"/>
-            <a:ext cx="256489" cy="256489"/>
+            <a:off x="5885124" y="1651452"/>
+            <a:ext cx="340980" cy="340980"/>
           </a:xfrm>
           <a:prstGeom prst="ellipse">
             <a:avLst/>
@@ -8568,8 +8568,8 @@
         </p:nvSpPr>
         <p:spPr>
           <a:xfrm>
-            <a:off x="5161788" y="1668780"/>
-            <a:ext cx="388620" cy="388620"/>
+            <a:off x="6313932" y="1563624"/>
+            <a:ext cx="516636" cy="516636"/>
           </a:xfrm>
           <a:prstGeom prst="rect">
             <a:avLst/>
@@ -8593,8 +8593,8 @@
         </p:nvSpPr>
         <p:spPr>
           <a:xfrm>
-            <a:off x="3607308" y="2057400"/>
-            <a:ext cx="388620" cy="388620"/>
+            <a:off x="4247388" y="2080260"/>
+            <a:ext cx="516636" cy="516636"/>
           </a:xfrm>
           <a:prstGeom prst="rect">
             <a:avLst/>
@@ -8618,8 +8618,8 @@
         </p:nvSpPr>
         <p:spPr>
           <a:xfrm>
-            <a:off x="3995928" y="2057400"/>
-            <a:ext cx="388620" cy="388620"/>
+            <a:off x="4764024" y="2080260"/>
+            <a:ext cx="516636" cy="516636"/>
           </a:xfrm>
           <a:prstGeom prst="rect">
             <a:avLst/>
@@ -8643,8 +8643,8 @@
         </p:nvSpPr>
         <p:spPr>
           <a:xfrm>
-            <a:off x="4384548" y="2057400"/>
-            <a:ext cx="388620" cy="388620"/>
+            <a:off x="5280660" y="2080260"/>
+            <a:ext cx="516636" cy="516636"/>
           </a:xfrm>
           <a:prstGeom prst="rect">
             <a:avLst/>
@@ -8668,8 +8668,8 @@
         </p:nvSpPr>
         <p:spPr>
           <a:xfrm>
-            <a:off x="4773168" y="2057400"/>
-            <a:ext cx="388620" cy="388620"/>
+            <a:off x="5797296" y="2080260"/>
+            <a:ext cx="516636" cy="516636"/>
           </a:xfrm>
           <a:prstGeom prst="rect">
             <a:avLst/>
@@ -8693,8 +8693,8 @@
         </p:nvSpPr>
         <p:spPr>
           <a:xfrm>
-            <a:off x="5161788" y="2057400"/>
-            <a:ext cx="388620" cy="388620"/>
+            <a:off x="6313932" y="2080260"/>
+            <a:ext cx="516636" cy="516636"/>
           </a:xfrm>
           <a:prstGeom prst="rect">
             <a:avLst/>
@@ -8718,8 +8718,8 @@
         </p:nvSpPr>
         <p:spPr>
           <a:xfrm>
-            <a:off x="3607308" y="1668780"/>
-            <a:ext cx="1943100" cy="777240"/>
+            <a:off x="4247388" y="1563624"/>
+            <a:ext cx="2583180" cy="1033272"/>
           </a:xfrm>
           <a:prstGeom prst="rect">
             <a:avLst/>
@@ -11392,7 +11392,7 @@
         </p:nvSpPr>
         <p:spPr>
           <a:xfrm>
-            <a:off x="2391156" y="2372868"/>
+            <a:off x="2571750" y="2372868"/>
             <a:ext cx="283464" cy="283464"/>
           </a:xfrm>
           <a:prstGeom prst="ellipse">
@@ -11417,7 +11417,7 @@
         </p:nvSpPr>
         <p:spPr>
           <a:xfrm>
-            <a:off x="2848356" y="2372868"/>
+            <a:off x="3028950" y="2372868"/>
             <a:ext cx="283464" cy="283464"/>
           </a:xfrm>
           <a:prstGeom prst="ellipse">
@@ -11442,7 +11442,7 @@
         </p:nvSpPr>
         <p:spPr>
           <a:xfrm>
-            <a:off x="3305556" y="2372868"/>
+            <a:off x="3486150" y="2372868"/>
             <a:ext cx="283464" cy="283464"/>
           </a:xfrm>
           <a:prstGeom prst="ellipse">
@@ -11467,7 +11467,7 @@
         </p:nvSpPr>
         <p:spPr>
           <a:xfrm>
-            <a:off x="3762756" y="2372868"/>
+            <a:off x="3943350" y="2372868"/>
             <a:ext cx="283464" cy="283464"/>
           </a:xfrm>
           <a:prstGeom prst="ellipse">
@@ -11492,7 +11492,7 @@
         </p:nvSpPr>
         <p:spPr>
           <a:xfrm>
-            <a:off x="4219956" y="2372868"/>
+            <a:off x="4400550" y="2372868"/>
             <a:ext cx="283464" cy="283464"/>
           </a:xfrm>
           <a:prstGeom prst="ellipse">
@@ -11517,7 +11517,7 @@
         </p:nvSpPr>
         <p:spPr>
           <a:xfrm>
-            <a:off x="2391156" y="2830068"/>
+            <a:off x="2571750" y="2830068"/>
             <a:ext cx="283464" cy="283464"/>
           </a:xfrm>
           <a:prstGeom prst="ellipse">
@@ -11542,7 +11542,7 @@
         </p:nvSpPr>
         <p:spPr>
           <a:xfrm>
-            <a:off x="2848356" y="2830068"/>
+            <a:off x="3028950" y="2830068"/>
             <a:ext cx="283464" cy="283464"/>
           </a:xfrm>
           <a:prstGeom prst="ellipse">
@@ -11567,7 +11567,7 @@
         </p:nvSpPr>
         <p:spPr>
           <a:xfrm>
-            <a:off x="3305556" y="2830068"/>
+            <a:off x="3486150" y="2830068"/>
             <a:ext cx="283464" cy="283464"/>
           </a:xfrm>
           <a:prstGeom prst="ellipse">
@@ -11592,7 +11592,7 @@
         </p:nvSpPr>
         <p:spPr>
           <a:xfrm>
-            <a:off x="3762756" y="2830068"/>
+            <a:off x="3943350" y="2830068"/>
             <a:ext cx="283464" cy="283464"/>
           </a:xfrm>
           <a:prstGeom prst="ellipse">
@@ -11617,7 +11617,7 @@
         </p:nvSpPr>
         <p:spPr>
           <a:xfrm>
-            <a:off x="4219956" y="2830068"/>
+            <a:off x="4400550" y="2830068"/>
             <a:ext cx="283464" cy="283464"/>
           </a:xfrm>
           <a:prstGeom prst="ellipse">
@@ -11642,7 +11642,7 @@
         </p:nvSpPr>
         <p:spPr>
           <a:xfrm>
-            <a:off x="2304288" y="2286000"/>
+            <a:off x="2484882" y="2286000"/>
             <a:ext cx="2286000" cy="914400"/>
           </a:xfrm>
           <a:prstGeom prst="rect">
@@ -11718,7 +11718,7 @@
         </p:nvSpPr>
         <p:spPr>
           <a:xfrm>
-            <a:off x="8577072" y="2372868"/>
+            <a:off x="8757666" y="2372868"/>
             <a:ext cx="283464" cy="283464"/>
           </a:xfrm>
           <a:prstGeom prst="ellipse">
@@ -11743,7 +11743,7 @@
         </p:nvSpPr>
         <p:spPr>
           <a:xfrm>
-            <a:off x="9034272" y="2372868"/>
+            <a:off x="9214866" y="2372868"/>
             <a:ext cx="283464" cy="283464"/>
           </a:xfrm>
           <a:prstGeom prst="ellipse">
@@ -11768,7 +11768,7 @@
         </p:nvSpPr>
         <p:spPr>
           <a:xfrm>
-            <a:off x="9491472" y="2372868"/>
+            <a:off x="9672066" y="2372868"/>
             <a:ext cx="283464" cy="283464"/>
           </a:xfrm>
           <a:prstGeom prst="ellipse">
@@ -11793,7 +11793,7 @@
         </p:nvSpPr>
         <p:spPr>
           <a:xfrm>
-            <a:off x="8577072" y="2830068"/>
+            <a:off x="8757666" y="2830068"/>
             <a:ext cx="283464" cy="283464"/>
           </a:xfrm>
           <a:prstGeom prst="ellipse">
@@ -11818,7 +11818,7 @@
         </p:nvSpPr>
         <p:spPr>
           <a:xfrm>
-            <a:off x="9034272" y="2830068"/>
+            <a:off x="9214866" y="2830068"/>
             <a:ext cx="283464" cy="283464"/>
           </a:xfrm>
           <a:prstGeom prst="ellipse">
@@ -11843,7 +11843,7 @@
         </p:nvSpPr>
         <p:spPr>
           <a:xfrm>
-            <a:off x="8490204" y="2286000"/>
+            <a:off x="8670798" y="2286000"/>
             <a:ext cx="1371600" cy="914400"/>
           </a:xfrm>
           <a:prstGeom prst="rect">
@@ -11919,7 +11919,7 @@
         </p:nvSpPr>
         <p:spPr>
           <a:xfrm>
-            <a:off x="1933956" y="4018788"/>
+            <a:off x="2114550" y="4018788"/>
             <a:ext cx="283464" cy="283464"/>
           </a:xfrm>
           <a:prstGeom prst="ellipse">
@@ -11944,7 +11944,7 @@
         </p:nvSpPr>
         <p:spPr>
           <a:xfrm>
-            <a:off x="2391156" y="4018788"/>
+            <a:off x="2571750" y="4018788"/>
             <a:ext cx="283464" cy="283464"/>
           </a:xfrm>
           <a:prstGeom prst="ellipse">
@@ -11969,7 +11969,7 @@
         </p:nvSpPr>
         <p:spPr>
           <a:xfrm>
-            <a:off x="2848356" y="4018788"/>
+            <a:off x="3028950" y="4018788"/>
             <a:ext cx="283464" cy="283464"/>
           </a:xfrm>
           <a:prstGeom prst="ellipse">
@@ -11994,7 +11994,7 @@
         </p:nvSpPr>
         <p:spPr>
           <a:xfrm>
-            <a:off x="3305556" y="4018788"/>
+            <a:off x="3486150" y="4018788"/>
             <a:ext cx="283464" cy="283464"/>
           </a:xfrm>
           <a:prstGeom prst="ellipse">
@@ -12019,7 +12019,7 @@
         </p:nvSpPr>
         <p:spPr>
           <a:xfrm>
-            <a:off x="3762756" y="4018788"/>
+            <a:off x="3943350" y="4018788"/>
             <a:ext cx="283464" cy="283464"/>
           </a:xfrm>
           <a:prstGeom prst="ellipse">
@@ -12044,7 +12044,7 @@
         </p:nvSpPr>
         <p:spPr>
           <a:xfrm>
-            <a:off x="4219956" y="4018788"/>
+            <a:off x="4400550" y="4018788"/>
             <a:ext cx="283464" cy="283464"/>
           </a:xfrm>
           <a:prstGeom prst="ellipse">
@@ -12069,7 +12069,7 @@
         </p:nvSpPr>
         <p:spPr>
           <a:xfrm>
-            <a:off x="4677156" y="4018788"/>
+            <a:off x="4857750" y="4018788"/>
             <a:ext cx="283464" cy="283464"/>
           </a:xfrm>
           <a:prstGeom prst="ellipse">
@@ -12094,7 +12094,7 @@
         </p:nvSpPr>
         <p:spPr>
           <a:xfrm>
-            <a:off x="1933956" y="4475988"/>
+            <a:off x="2114550" y="4475988"/>
             <a:ext cx="283464" cy="283464"/>
           </a:xfrm>
           <a:prstGeom prst="ellipse">
@@ -12119,7 +12119,7 @@
         </p:nvSpPr>
         <p:spPr>
           <a:xfrm>
-            <a:off x="2391156" y="4475988"/>
+            <a:off x="2571750" y="4475988"/>
             <a:ext cx="283464" cy="283464"/>
           </a:xfrm>
           <a:prstGeom prst="ellipse">
@@ -12144,7 +12144,7 @@
         </p:nvSpPr>
         <p:spPr>
           <a:xfrm>
-            <a:off x="2848356" y="4475988"/>
+            <a:off x="3028950" y="4475988"/>
             <a:ext cx="283464" cy="283464"/>
           </a:xfrm>
           <a:prstGeom prst="ellipse">
@@ -12169,7 +12169,7 @@
         </p:nvSpPr>
         <p:spPr>
           <a:xfrm>
-            <a:off x="3305556" y="4475988"/>
+            <a:off x="3486150" y="4475988"/>
             <a:ext cx="283464" cy="283464"/>
           </a:xfrm>
           <a:prstGeom prst="ellipse">
@@ -12194,7 +12194,7 @@
         </p:nvSpPr>
         <p:spPr>
           <a:xfrm>
-            <a:off x="3762756" y="4475988"/>
+            <a:off x="3943350" y="4475988"/>
             <a:ext cx="283464" cy="283464"/>
           </a:xfrm>
           <a:prstGeom prst="ellipse">
@@ -12219,7 +12219,7 @@
         </p:nvSpPr>
         <p:spPr>
           <a:xfrm>
-            <a:off x="4219956" y="4475988"/>
+            <a:off x="4400550" y="4475988"/>
             <a:ext cx="283464" cy="283464"/>
           </a:xfrm>
           <a:prstGeom prst="ellipse">
@@ -12244,7 +12244,7 @@
         </p:nvSpPr>
         <p:spPr>
           <a:xfrm>
-            <a:off x="1847088" y="3931920"/>
+            <a:off x="2027682" y="3931920"/>
             <a:ext cx="3200400" cy="914400"/>
           </a:xfrm>
           <a:prstGeom prst="rect">
@@ -12320,7 +12320,7 @@
         </p:nvSpPr>
         <p:spPr>
           <a:xfrm>
-            <a:off x="7434072" y="4018788"/>
+            <a:off x="7614666" y="4018788"/>
             <a:ext cx="283464" cy="283464"/>
           </a:xfrm>
           <a:prstGeom prst="ellipse">
@@ -12345,7 +12345,7 @@
         </p:nvSpPr>
         <p:spPr>
           <a:xfrm>
-            <a:off x="7891272" y="4018788"/>
+            <a:off x="8071866" y="4018788"/>
             <a:ext cx="283464" cy="283464"/>
           </a:xfrm>
           <a:prstGeom prst="ellipse">
@@ -12370,7 +12370,7 @@
         </p:nvSpPr>
         <p:spPr>
           <a:xfrm>
-            <a:off x="8348472" y="4018788"/>
+            <a:off x="8529066" y="4018788"/>
             <a:ext cx="283464" cy="283464"/>
           </a:xfrm>
           <a:prstGeom prst="ellipse">
@@ -12395,7 +12395,7 @@
         </p:nvSpPr>
         <p:spPr>
           <a:xfrm>
-            <a:off x="8805672" y="4018788"/>
+            <a:off x="8986266" y="4018788"/>
             <a:ext cx="283464" cy="283464"/>
           </a:xfrm>
           <a:prstGeom prst="ellipse">
@@ -12420,7 +12420,7 @@
         </p:nvSpPr>
         <p:spPr>
           <a:xfrm>
-            <a:off x="9262872" y="4018788"/>
+            <a:off x="9443466" y="4018788"/>
             <a:ext cx="283464" cy="283464"/>
           </a:xfrm>
           <a:prstGeom prst="ellipse">
@@ -12445,7 +12445,7 @@
         </p:nvSpPr>
         <p:spPr>
           <a:xfrm>
-            <a:off x="9720072" y="4018788"/>
+            <a:off x="9900666" y="4018788"/>
             <a:ext cx="283464" cy="283464"/>
           </a:xfrm>
           <a:prstGeom prst="ellipse">
@@ -12470,7 +12470,7 @@
         </p:nvSpPr>
         <p:spPr>
           <a:xfrm>
-            <a:off x="10177272" y="4018788"/>
+            <a:off x="10357866" y="4018788"/>
             <a:ext cx="283464" cy="283464"/>
           </a:xfrm>
           <a:prstGeom prst="ellipse">
@@ -12495,7 +12495,7 @@
         </p:nvSpPr>
         <p:spPr>
           <a:xfrm>
-            <a:off x="10634472" y="4018788"/>
+            <a:off x="10815066" y="4018788"/>
             <a:ext cx="283464" cy="283464"/>
           </a:xfrm>
           <a:prstGeom prst="ellipse">
@@ -12520,7 +12520,7 @@
         </p:nvSpPr>
         <p:spPr>
           <a:xfrm>
-            <a:off x="7434072" y="4475988"/>
+            <a:off x="7614666" y="4475988"/>
             <a:ext cx="283464" cy="283464"/>
           </a:xfrm>
           <a:prstGeom prst="ellipse">
@@ -12545,7 +12545,7 @@
         </p:nvSpPr>
         <p:spPr>
           <a:xfrm>
-            <a:off x="7891272" y="4475988"/>
+            <a:off x="8071866" y="4475988"/>
             <a:ext cx="283464" cy="283464"/>
           </a:xfrm>
           <a:prstGeom prst="ellipse">
@@ -12570,7 +12570,7 @@
         </p:nvSpPr>
         <p:spPr>
           <a:xfrm>
-            <a:off x="8348472" y="4475988"/>
+            <a:off x="8529066" y="4475988"/>
             <a:ext cx="283464" cy="283464"/>
           </a:xfrm>
           <a:prstGeom prst="ellipse">
@@ -12595,7 +12595,7 @@
         </p:nvSpPr>
         <p:spPr>
           <a:xfrm>
-            <a:off x="8805672" y="4475988"/>
+            <a:off x="8986266" y="4475988"/>
             <a:ext cx="283464" cy="283464"/>
           </a:xfrm>
           <a:prstGeom prst="ellipse">
@@ -12620,7 +12620,7 @@
         </p:nvSpPr>
         <p:spPr>
           <a:xfrm>
-            <a:off x="9262872" y="4475988"/>
+            <a:off x="9443466" y="4475988"/>
             <a:ext cx="283464" cy="283464"/>
           </a:xfrm>
           <a:prstGeom prst="ellipse">
@@ -12645,7 +12645,7 @@
         </p:nvSpPr>
         <p:spPr>
           <a:xfrm>
-            <a:off x="9720072" y="4475988"/>
+            <a:off x="9900666" y="4475988"/>
             <a:ext cx="283464" cy="283464"/>
           </a:xfrm>
           <a:prstGeom prst="ellipse">
@@ -12670,7 +12670,7 @@
         </p:nvSpPr>
         <p:spPr>
           <a:xfrm>
-            <a:off x="10177272" y="4475988"/>
+            <a:off x="10357866" y="4475988"/>
             <a:ext cx="283464" cy="283464"/>
           </a:xfrm>
           <a:prstGeom prst="ellipse">
@@ -12695,7 +12695,7 @@
         </p:nvSpPr>
         <p:spPr>
           <a:xfrm>
-            <a:off x="10634472" y="4475988"/>
+            <a:off x="10815066" y="4475988"/>
             <a:ext cx="283464" cy="283464"/>
           </a:xfrm>
           <a:prstGeom prst="ellipse">
@@ -12720,7 +12720,7 @@
         </p:nvSpPr>
         <p:spPr>
           <a:xfrm>
-            <a:off x="7347204" y="3931920"/>
+            <a:off x="7527798" y="3931920"/>
             <a:ext cx="3657600" cy="914400"/>
           </a:xfrm>
           <a:prstGeom prst="rect">

--- a/dist/초1/수학/몇째와짝수홀수/초1_수학_몇째와짝수홀수_02_짝수와홀수_학생용.pptx
+++ b/dist/초1/수학/몇째와짝수홀수/초1_수학_몇째와짝수홀수_02_짝수와홀수_학생용.pptx
@@ -120,13 +120,13 @@
   <p:extLst>
     <p:ext uri="{521415D9-36F7-43E2-AB2F-B90AF26B5E84}">
       <p14:sectionLst xmlns:p14="http://schemas.microsoft.com/office/powerpoint/2010/main">
-        <p14:section name="도입" id="{eb3716f9-2c34-76c5-d66a-09f5f1facafc}">
+        <p14:section name="도입" id="{e29d3bd5-d925-e217-bea9-6df343b513cc}">
           <p14:sldIdLst>
             <p14:sldId id="256"/>
             <p14:sldId id="257"/>
           </p14:sldIdLst>
         </p14:section>
-        <p14:section name="개념" id="{efac154c-3734-401f-5d08-a36afcc41781}">
+        <p14:section name="개념" id="{dd9c60b8-5208-6bf1-021d-c1991669cf76}">
           <p14:sldIdLst>
             <p14:sldId id="258"/>
             <p14:sldId id="259"/>
@@ -135,31 +135,31 @@
             <p14:sldId id="263"/>
           </p14:sldIdLst>
         </p14:section>
-        <p14:section name="연습" id="{7a671f0c-896b-97ec-8df5-d581fd65dfe3}">
+        <p14:section name="연습" id="{0b0e9aa5-cf81-bf7c-38b3-5dbde6d69bef}">
           <p14:sldIdLst>
             <p14:sldId id="261"/>
             <p14:sldId id="264"/>
             <p14:sldId id="265"/>
           </p14:sldIdLst>
         </p14:section>
-        <p14:section name="개념" id="{4ed55613-5ed5-4716-f79b-6e4e1d815534}">
+        <p14:section name="개념" id="{7aec8d42-37f5-b52f-eff5-7a88f5e7fea2}">
           <p14:sldIdLst/>
         </p14:section>
-        <p14:section name="연습" id="{9440d50c-bd8f-f543-d2d2-5a2e95b1b653}">
+        <p14:section name="연습" id="{2c68cb38-73d4-68f0-315f-563000f47dc8}">
           <p14:sldIdLst/>
         </p14:section>
-        <p14:section name="확인" id="{f6e94d02-8f23-9141-f943-7b74c37aac10}">
+        <p14:section name="확인" id="{b0f4d497-4a86-191b-d958-2c148dbb3543}">
           <p14:sldIdLst>
             <p14:sldId id="266"/>
             <p14:sldId id="267"/>
           </p14:sldIdLst>
         </p14:section>
-        <p14:section name="정리" id="{4098a936-f562-13e6-d816-b83c9769acd7}">
+        <p14:section name="정리" id="{3e60de37-061a-6e46-aef4-7e850b60bb6f}">
           <p14:sldIdLst>
             <p14:sldId id="268"/>
           </p14:sldIdLst>
         </p14:section>
-        <p14:section name="보충" id="{dd924676-c506-13c0-a967-58b594b135aa}">
+        <p14:section name="보충" id="{a0ba6767-acd6-27c3-1c5f-cd9cacf021b1}">
           <p14:sldIdLst>
             <p14:sldId id="269"/>
           </p14:sldIdLst>
